--- a/data/deep_dives/carteira_via_invest_i_0ae3a50e/exports/documentary_comparison.pptx
+++ b/data/deep_dives/carteira_via_invest_i_0ae3a50e/exports/documentary_comparison.pptx
@@ -4281,7 +4281,7 @@
                       <a:r>
                         <a:rPr sz="1300" b="1">
                           <a:solidFill>
-                            <a:srgbClr val="1F1F1F"/>
+                            <a:srgbClr val="FFFFFF"/>
                           </a:solidFill>
                           <a:latin typeface="Calibri"/>
                         </a:rPr>
@@ -4291,7 +4291,7 @@
                   </a:txBody>
                   <a:tcPr marL="91440" marR="91440" marT="41148" marB="41148" anchor="ctr">
                     <a:solidFill>
-                      <a:srgbClr val="EC7000"/>
+                      <a:srgbClr val="FF6200"/>
                     </a:solidFill>
                     <a:lnL>
                       <a:noFill/>
@@ -4330,7 +4330,7 @@
                       <a:r>
                         <a:rPr sz="1300" b="1">
                           <a:solidFill>
-                            <a:srgbClr val="1F1F1F"/>
+                            <a:srgbClr val="FFFFFF"/>
                           </a:solidFill>
                           <a:latin typeface="Calibri"/>
                         </a:rPr>
@@ -4340,7 +4340,7 @@
                   </a:txBody>
                   <a:tcPr marL="91440" marR="91440" marT="41148" marB="41148" anchor="ctr">
                     <a:solidFill>
-                      <a:srgbClr val="EC7000"/>
+                      <a:srgbClr val="FF6200"/>
                     </a:solidFill>
                     <a:lnL>
                       <a:noFill/>
@@ -5084,7 +5084,7 @@
         </p:nvGraphicFramePr>
         <p:xfrm>
           <a:off x="438912" y="932688"/>
-          <a:ext cx="11313871" cy="2185416"/>
+          <a:ext cx="11313871" cy="1997964"/>
         </p:xfrm>
         <a:graphic>
           <a:graphicData uri="http://schemas.openxmlformats.org/drawingml/2006/table">
@@ -5118,7 +5118,7 @@
                       <a:r>
                         <a:rPr sz="1300" b="1">
                           <a:solidFill>
-                            <a:srgbClr val="1F1F1F"/>
+                            <a:srgbClr val="FFFFFF"/>
                           </a:solidFill>
                           <a:latin typeface="Calibri"/>
                         </a:rPr>
@@ -5128,7 +5128,7 @@
                   </a:txBody>
                   <a:tcPr marL="91440" marR="91440" marT="41148" marB="41148" anchor="ctr">
                     <a:solidFill>
-                      <a:srgbClr val="EC7000"/>
+                      <a:srgbClr val="FF6200"/>
                     </a:solidFill>
                     <a:lnL>
                       <a:noFill/>
@@ -5167,7 +5167,7 @@
                       <a:r>
                         <a:rPr sz="1300" b="1">
                           <a:solidFill>
-                            <a:srgbClr val="1F1F1F"/>
+                            <a:srgbClr val="FFFFFF"/>
                           </a:solidFill>
                           <a:latin typeface="Calibri"/>
                         </a:rPr>
@@ -5177,7 +5177,7 @@
                   </a:txBody>
                   <a:tcPr marL="91440" marR="91440" marT="41148" marB="41148" anchor="ctr">
                     <a:solidFill>
-                      <a:srgbClr val="EC7000"/>
+                      <a:srgbClr val="FF6200"/>
                     </a:solidFill>
                     <a:lnL>
                       <a:noFill/>
@@ -5624,7 +5624,7 @@
                   </a:tcPr>
                 </a:tc>
               </a:tr>
-              <a:tr h="470916">
+              <a:tr h="283464">
                 <a:tc>
                   <a:txBody>
                     <a:bodyPr wrap="square">
@@ -5699,29 +5699,7 @@
                           </a:solidFill>
                           <a:latin typeface="Calibri"/>
                         </a:rPr>
-                        <a:t>Piso quantitativo de PDD não confirmado; perda absorvida primeiro por júnior, depois mezanino e</a:t>
-                      </a:r>
-                    </a:p>
-                    <a:p>
-                      <a:pPr algn="ctr">
-                        <a:lnSpc>
-                          <a:spcPct val="100000"/>
-                        </a:lnSpc>
-                        <a:spcBef>
-                          <a:spcPts val="0"/>
-                        </a:spcBef>
-                        <a:spcAft>
-                          <a:spcPts val="0"/>
-                        </a:spcAft>
-                      </a:pPr>
-                      <a:r>
-                        <a:rPr sz="1300" b="0">
-                          <a:solidFill>
-                            <a:srgbClr val="1F1F1F"/>
-                          </a:solidFill>
-                          <a:latin typeface="Calibri"/>
-                        </a:rPr>
-                        <a:t>sênior</a:t>
+                        <a:t>perda absorvida primeiro por júnior, depois mezanino e sênior</a:t>
                       </a:r>
                     </a:p>
                   </a:txBody>
@@ -5925,7 +5903,7 @@
                       <a:r>
                         <a:rPr sz="1300" b="1">
                           <a:solidFill>
-                            <a:srgbClr val="1F1F1F"/>
+                            <a:srgbClr val="FFFFFF"/>
                           </a:solidFill>
                           <a:latin typeface="Calibri"/>
                         </a:rPr>
@@ -5935,7 +5913,7 @@
                   </a:txBody>
                   <a:tcPr marL="91440" marR="91440" marT="41148" marB="41148" anchor="ctr">
                     <a:solidFill>
-                      <a:srgbClr val="EC7000"/>
+                      <a:srgbClr val="FF6200"/>
                     </a:solidFill>
                     <a:lnL>
                       <a:noFill/>
@@ -5974,7 +5952,7 @@
                       <a:r>
                         <a:rPr sz="1300" b="1">
                           <a:solidFill>
-                            <a:srgbClr val="1F1F1F"/>
+                            <a:srgbClr val="FFFFFF"/>
                           </a:solidFill>
                           <a:latin typeface="Calibri"/>
                         </a:rPr>
@@ -5984,7 +5962,7 @@
                   </a:txBody>
                   <a:tcPr marL="91440" marR="91440" marT="41148" marB="41148" anchor="ctr">
                     <a:solidFill>
-                      <a:srgbClr val="EC7000"/>
+                      <a:srgbClr val="FF6200"/>
                     </a:solidFill>
                     <a:lnL>
                       <a:noFill/>
@@ -6806,7 +6784,7 @@
                       <a:r>
                         <a:rPr sz="1300" b="1">
                           <a:solidFill>
-                            <a:srgbClr val="1F1F1F"/>
+                            <a:srgbClr val="FFFFFF"/>
                           </a:solidFill>
                           <a:latin typeface="Calibri"/>
                         </a:rPr>
@@ -6816,7 +6794,7 @@
                   </a:txBody>
                   <a:tcPr marL="91440" marR="91440" marT="41148" marB="41148" anchor="ctr">
                     <a:solidFill>
-                      <a:srgbClr val="EC7000"/>
+                      <a:srgbClr val="FF6200"/>
                     </a:solidFill>
                     <a:lnL>
                       <a:noFill/>
@@ -6855,7 +6833,7 @@
                       <a:r>
                         <a:rPr sz="1300" b="1">
                           <a:solidFill>
-                            <a:srgbClr val="1F1F1F"/>
+                            <a:srgbClr val="FFFFFF"/>
                           </a:solidFill>
                           <a:latin typeface="Calibri"/>
                         </a:rPr>
@@ -6865,7 +6843,7 @@
                   </a:txBody>
                   <a:tcPr marL="91440" marR="91440" marT="41148" marB="41148" anchor="ctr">
                     <a:solidFill>
-                      <a:srgbClr val="EC7000"/>
+                      <a:srgbClr val="FF6200"/>
                     </a:solidFill>
                     <a:lnL>
                       <a:noFill/>
@@ -7451,7 +7429,7 @@
                       <a:r>
                         <a:rPr sz="1300" b="1">
                           <a:solidFill>
-                            <a:srgbClr val="1F1F1F"/>
+                            <a:srgbClr val="FFFFFF"/>
                           </a:solidFill>
                           <a:latin typeface="Calibri"/>
                         </a:rPr>
@@ -7461,7 +7439,7 @@
                   </a:txBody>
                   <a:tcPr marL="91440" marR="91440" marT="41148" marB="41148" anchor="ctr">
                     <a:solidFill>
-                      <a:srgbClr val="EC7000"/>
+                      <a:srgbClr val="FF6200"/>
                     </a:solidFill>
                     <a:lnL>
                       <a:noFill/>
@@ -7500,7 +7478,7 @@
                       <a:r>
                         <a:rPr sz="1300" b="1">
                           <a:solidFill>
-                            <a:srgbClr val="1F1F1F"/>
+                            <a:srgbClr val="FFFFFF"/>
                           </a:solidFill>
                           <a:latin typeface="Calibri"/>
                         </a:rPr>
@@ -7510,7 +7488,7 @@
                   </a:txBody>
                   <a:tcPr marL="91440" marR="91440" marT="41148" marB="41148" anchor="ctr">
                     <a:solidFill>
-                      <a:srgbClr val="EC7000"/>
+                      <a:srgbClr val="FF6200"/>
                     </a:solidFill>
                     <a:lnL>
                       <a:noFill/>
@@ -7796,7 +7774,7 @@
                           </a:solidFill>
                           <a:latin typeface="Calibri"/>
                         </a:rPr>
-                        <a:t>12ª série: 24 meses da primeira integralização; data fechada não localizada</a:t>
+                        <a:t>12ª série: 24 meses da primeira integralização</a:t>
                       </a:r>
                     </a:p>
                   </a:txBody>
@@ -8000,7 +7978,7 @@
                       <a:r>
                         <a:rPr sz="1300" b="1">
                           <a:solidFill>
-                            <a:srgbClr val="1F1F1F"/>
+                            <a:srgbClr val="FFFFFF"/>
                           </a:solidFill>
                           <a:latin typeface="Calibri"/>
                         </a:rPr>
@@ -8010,7 +7988,7 @@
                   </a:txBody>
                   <a:tcPr marL="91440" marR="91440" marT="41148" marB="41148" anchor="ctr">
                     <a:solidFill>
-                      <a:srgbClr val="EC7000"/>
+                      <a:srgbClr val="FF6200"/>
                     </a:solidFill>
                     <a:lnL>
                       <a:noFill/>
@@ -8049,7 +8027,7 @@
                       <a:r>
                         <a:rPr sz="1300" b="1">
                           <a:solidFill>
-                            <a:srgbClr val="1F1F1F"/>
+                            <a:srgbClr val="FFFFFF"/>
                           </a:solidFill>
                           <a:latin typeface="Calibri"/>
                         </a:rPr>
@@ -8059,7 +8037,7 @@
                   </a:txBody>
                   <a:tcPr marL="91440" marR="91440" marT="41148" marB="41148" anchor="ctr">
                     <a:solidFill>
-                      <a:srgbClr val="EC7000"/>
+                      <a:srgbClr val="FF6200"/>
                     </a:solidFill>
                     <a:lnL>
                       <a:noFill/>
@@ -8549,7 +8527,7 @@
                       <a:r>
                         <a:rPr sz="1300" b="1">
                           <a:solidFill>
-                            <a:srgbClr val="1F1F1F"/>
+                            <a:srgbClr val="FFFFFF"/>
                           </a:solidFill>
                           <a:latin typeface="Calibri"/>
                         </a:rPr>
@@ -8559,7 +8537,7 @@
                   </a:txBody>
                   <a:tcPr marL="91440" marR="91440" marT="41148" marB="41148" anchor="ctr">
                     <a:solidFill>
-                      <a:srgbClr val="EC7000"/>
+                      <a:srgbClr val="FF6200"/>
                     </a:solidFill>
                     <a:lnL>
                       <a:noFill/>
@@ -8598,7 +8576,7 @@
                       <a:r>
                         <a:rPr sz="1300" b="1">
                           <a:solidFill>
-                            <a:srgbClr val="1F1F1F"/>
+                            <a:srgbClr val="FFFFFF"/>
                           </a:solidFill>
                           <a:latin typeface="Calibri"/>
                         </a:rPr>
@@ -8608,7 +8586,7 @@
                   </a:txBody>
                   <a:tcPr marL="91440" marR="91440" marT="41148" marB="41148" anchor="ctr">
                     <a:solidFill>
-                      <a:srgbClr val="EC7000"/>
+                      <a:srgbClr val="FF6200"/>
                     </a:solidFill>
                     <a:lnL>
                       <a:noFill/>
@@ -8722,7 +8700,7 @@
                           </a:solidFill>
                           <a:latin typeface="Calibri"/>
                         </a:rPr>
-                        <a:t>Direitos creditórios / PL e cotas subordinadas / PL; validar fórmula contratual antes de comparar</a:t>
+                        <a:t>Direitos creditórios / PL e cotas subordinadas / PL</a:t>
                       </a:r>
                     </a:p>
                   </a:txBody>
@@ -9012,7 +8990,7 @@
                           </a:solidFill>
                           <a:latin typeface="Calibri"/>
                         </a:rPr>
-                        <a:t>Sem competência IME carregada em cache local</a:t>
+                        <a:t>-</a:t>
                       </a:r>
                     </a:p>
                   </a:txBody>
